--- a/Chapter 5 - Computer Vision/VisionOnRaspberryPi.pptx
+++ b/Chapter 5 - Computer Vision/VisionOnRaspberryPi.pptx
@@ -261,7 +261,7 @@
       <p15:sldGuideLst xmlns:p15="http://schemas.microsoft.com/office/powerpoint/2012/main"/>
     </p:ext>
     <p:ext uri="http://customooxmlschemas.google.com/">
-      <go:slidesCustomData xmlns="" xmlns:mc="http://schemas.openxmlformats.org/markup-compatibility/2006" xmlns:mv="urn:schemas-microsoft-com:mac:vml" xmlns:c="http://schemas.openxmlformats.org/drawingml/2006/chart" xmlns:dgm="http://schemas.openxmlformats.org/drawingml/2006/diagram" xmlns:o="urn:schemas-microsoft-com:office:office" xmlns:v="urn:schemas-microsoft-com:vml" xmlns:pvml="urn:schemas-microsoft-com:office:powerpoint" xmlns:com="http://schemas.openxmlformats.org/drawingml/2006/compatibility" xmlns:p14="http://schemas.microsoft.com/office/powerpoint/2010/main" xmlns:p15="http://schemas.microsoft.com/office/powerpoint/2012/main" xmlns:ahyp="http://schemas.microsoft.com/office/drawing/2018/hyperlinkcolor" xmlns:go="http://customooxmlschemas.google.com/" r:id="rId38" roundtripDataSignature="AMtx7mhUVJU3jbxGl11X7yrLJ5REy1msmg=="/>
+      <go:slidesCustomData xmlns:go="http://customooxmlschemas.google.com/" xmlns:ahyp="http://schemas.microsoft.com/office/drawing/2018/hyperlinkcolor" xmlns:p15="http://schemas.microsoft.com/office/powerpoint/2012/main" xmlns:p14="http://schemas.microsoft.com/office/powerpoint/2010/main" xmlns:com="http://schemas.openxmlformats.org/drawingml/2006/compatibility" xmlns:pvml="urn:schemas-microsoft-com:office:powerpoint" xmlns:v="urn:schemas-microsoft-com:vml" xmlns:o="urn:schemas-microsoft-com:office:office" xmlns:dgm="http://schemas.openxmlformats.org/drawingml/2006/diagram" xmlns:c="http://schemas.openxmlformats.org/drawingml/2006/chart" xmlns:mv="urn:schemas-microsoft-com:mac:vml" xmlns:mc="http://schemas.openxmlformats.org/markup-compatibility/2006" xmlns="" r:id="rId38" roundtripDataSignature="AMtx7mhUVJU3jbxGl11X7yrLJ5REy1msmg=="/>
     </p:ext>
   </p:extLst>
 </p:presentation>
@@ -2028,18 +2028,6 @@
               <a:buSzPts val="1400"/>
               <a:buNone/>
             </a:pPr>
-            <a:r>
-              <a:rPr lang="he-IL" dirty="0"/>
-              <a:t>אני אתמקד בעיקר בזיהוי חלקי ומציאת המיקום שלהם ביחס לרובוט, זה משום שזיהוי </a:t>
-            </a:r>
-            <a:r>
-              <a:rPr lang="he-IL" dirty="0" err="1"/>
-              <a:t>תאגים</a:t>
-            </a:r>
-            <a:r>
-              <a:rPr lang="he-IL" dirty="0"/>
-              <a:t> נעשה בצורה זהה כל שנה וזיהוי חלקי משחק משתנה.</a:t>
-            </a:r>
             <a:endParaRPr dirty="0"/>
           </a:p>
         </p:txBody>
@@ -2294,18 +2282,6 @@
               <a:buSzPts val="1400"/>
               <a:buNone/>
             </a:pPr>
-            <a:r>
-              <a:rPr lang="he-IL" dirty="0"/>
-              <a:t>אנחנו משתמשים </a:t>
-            </a:r>
-            <a:r>
-              <a:rPr lang="he-IL" dirty="0" err="1"/>
-              <a:t>בפייטון</a:t>
-            </a:r>
-            <a:r>
-              <a:rPr lang="he-IL" dirty="0"/>
-              <a:t> בגלל שזה קל יותר ופשוט יותר בהשוואה לשפות אחרות</a:t>
-            </a:r>
             <a:endParaRPr dirty="0"/>
           </a:p>
         </p:txBody>
